--- a/knowledge/pitch/Kakis-DemoDay-Pitch.pptx
+++ b/knowledge/pitch/Kakis-DemoDay-Pitch.pptx
@@ -517,7 +517,7 @@
           <a:p>
             <a:r>
               <a:rPr lang="en-US" dirty="0"/>
-              <a:t>Open with the name: kakis — Singlish for the trusted companions you can call on. One sentence: we help family caregivers activate trusted respite within hours when a care crisis hits, starting from Vanguard's Pasir Ris pilot. The pass on the right is the product in one image: a known face, verified by Vanguard, that a senior recognises.</a:t>
+              <a:t>Open with the name: kakis — Singlish for the trusted companions you can call on. One sentence: we help family caregivers activate trusted respite when a need arises — urgent within hours, planned in advance — starting from Vanguard's Pasir Ris pilot. The pass on the right is the product in one image: a known face, verified by Vanguard, that a senior recognises.</a:t>
             </a:r>
             <a:endParaRPr lang="en-US" dirty="0"/>
           </a:p>
@@ -957,7 +957,7 @@
           <a:p>
             <a:r>
               <a:rPr lang="en-US" dirty="0"/>
-              <a:t>The pilot is a Vanguard operational scope — we don't need to solve full platform ownership to run it. Our deliverables by September: pilot design, KPI framework, the multi-payer business case. The KPIs are chosen to answer the three open questions: does crisis activation convert, does consistency hold at scale, do agent ops actually bend the cost curve.</a:t>
+              <a:t>The pilot is a Vanguard operational scope — we don't need to solve full platform ownership to run it. Our deliverables by September: pilot design, KPI framework, the multi-payer business case. The KPIs are chosen to answer the three open questions: do both demand curves (urgent and planned) convert, does consistency hold at scale, do agent ops actually bend the cost curve.</a:t>
             </a:r>
             <a:endParaRPr lang="en-US" dirty="0"/>
           </a:p>
@@ -1045,7 +1045,7 @@
           <a:p>
             <a:r>
               <a:rPr lang="en-US" dirty="0"/>
-              <a:t>Judges reward intellectual honesty; so does reality. These four are the strongest live critiques from our own devil's-advocate file — including one (the graveyard) we inherited knowingly from NCSS. The pattern in our answers: we're building the business case and ownership answer first, because that's what stalled everyone else.</a:t>
+              <a:t>Judges reward intellectual honesty; so does reality. These four are the strongest live critiques from our own devil's-advocate file — including one (two demand curves) we raised against ourselves the same day we broadened the HMW. The pattern in our answers: we're building the business case and ownership answer first, because that's what stalled everyone else.</a:t>
             </a:r>
             <a:endParaRPr lang="en-US" dirty="0"/>
           </a:p>
@@ -1221,7 +1221,7 @@
           <a:p>
             <a:r>
               <a:rPr lang="en-US" dirty="0"/>
-              <a:t>The rubric asks for evidence of learning and adaptation. This is it: four dated iterations, each triggered by evidence, none overwritten. The honest beat: on June 15 we admitted NCSS's question was sharper than ours — and took ten days to decide rather than pivoting performatively.</a:t>
+              <a:t>The rubric asks for evidence of learning and adaptation. This is it: four dated iterations, each triggered by evidence, none overwritten. Two honest beats: on June 15 we admitted NCSS's question was sharper than ours; on July 11 we corrected our own three-day-old framing when we saw crisis-only was too tight.</a:t>
             </a:r>
             <a:endParaRPr lang="en-US" dirty="0"/>
           </a:p>
@@ -1309,7 +1309,7 @@
           <a:p>
             <a:r>
               <a:rPr lang="en-US" dirty="0"/>
-              <a:t>The wedge is not routine chaperone — Vanguard runs that today at only 20–30 bookings a month. The pain concentrates in these six moments, when willingness to accept help (and to pay) spikes. Kakis is built for the moment the plan breaks.</a:t>
+              <a:t>The wedge is not routine chaperone — Vanguard runs that today at only 20–30 bookings a month. The pain peaks in these six urgent moments, when willingness to accept help (and to pay) spikes — but per the July 11 HMW the product also serves the planned everyday (appointments, vacations, weekly gap-fill), which is where the volume lives. Quote Vanguard here: caregivers don't plan until something happens.</a:t>
             </a:r>
             <a:endParaRPr lang="en-US" dirty="0"/>
           </a:p>
@@ -1837,7 +1837,7 @@
           <a:p>
             <a:r>
               <a:rPr lang="en-US" dirty="0"/>
-              <a:t>Walk the demo here if time allows. Three beats: the crisis picker leads (that's the wedge), the match is a known face with the consistency logic stated, and the price shows the multi-payer stack openly — $84 becomes $27. Feedback is a private care note, never a public star: MOH constraint, designed in from day one.</a:t>
+              <a:t>Walk the demo here if time allows. Three beats: the six-trigger picker serves the urgent path (Book-ahead runs the same flow for planned needs), the match is a known face with the consistency logic stated, and the price shows the multi-payer stack openly — $84 becomes $27. Feedback is a private care note, never a public star: MOH constraint, designed in from day one.</a:t>
             </a:r>
             <a:endParaRPr lang="en-US" dirty="0"/>
           </a:p>
@@ -2296,7 +2296,7 @@
                 <a:ea typeface="Cambria" pitchFamily="34" charset="-122"/>
                 <a:cs typeface="Cambria" pitchFamily="34" charset="-120"/>
               </a:rPr>
-              <a:t>Trusted respite when a crisis hits.</a:t>
+              <a:t>Trusted respite when a need arises.</a:t>
             </a:r>
             <a:endParaRPr lang="en-US" sz="2400" dirty="0"/>
           </a:p>
@@ -2338,7 +2338,7 @@
                 <a:ea typeface="Calibri" pitchFamily="34" charset="-122"/>
                 <a:cs typeface="Calibri" pitchFamily="34" charset="-120"/>
               </a:rPr>
-              <a:t>A crisis-activation respite platform for caregivers of Singapore's relatively healthy elderly — layered on Vanguard's Pasir Ris ICCP pilot.</a:t>
+              <a:t>A respite-activation platform for caregivers of Singapore's relatively healthy elderly — planned or urgent — layered on Vanguard's Pasir Ris ICCP pilot.</a:t>
             </a:r>
             <a:endParaRPr lang="en-US" sz="1450" dirty="0"/>
           </a:p>
@@ -5655,7 +5655,7 @@
                 <a:ea typeface="Calibri" pitchFamily="34" charset="-122"/>
                 <a:cs typeface="Calibri" pitchFamily="34" charset="-120"/>
               </a:rPr>
-              <a:t>First visit to a new senior → paired with Vanguard staff  ·  No public ratings or rankings of care staff (MOH/AIC policy)  ·  Certification tier must cover the task — no exceptions  ·  Crisis triggers jump the queue</a:t>
+              <a:t>First visit to a new senior → paired with Vanguard staff  ·  No public ratings or rankings of care staff (MOH/AIC policy)  ·  Certification tier must cover the task — no exceptions  ·  Urgent triggers jump the queue</a:t>
             </a:r>
             <a:endParaRPr lang="en-US" sz="1150" dirty="0"/>
           </a:p>
@@ -7886,7 +7886,7 @@
                 <a:ea typeface="Calibri" pitchFamily="34" charset="-122"/>
                 <a:cs typeface="Calibri" pitchFamily="34" charset="-120"/>
               </a:rPr>
-              <a:t>Crisis fill time: target &lt; 24 hrs (vs 3-day notice today)</a:t>
+              <a:t>Urgent fill &lt; 24 hrs; planned fill ≥ 95% (vs 3-day notice)</a:t>
             </a:r>
             <a:endParaRPr lang="en-US" sz="1050" dirty="0"/>
           </a:p>
@@ -9019,7 +9019,7 @@
                 <a:ea typeface="Cambria" pitchFamily="34" charset="-122"/>
                 <a:cs typeface="Cambria" pitchFamily="34" charset="-120"/>
               </a:rPr>
-              <a:t>The consistency constraint fights on-demand</a:t>
+              <a:t>Two demand curves in one product</a:t>
             </a:r>
             <a:endParaRPr lang="en-US" sz="1450" dirty="0"/>
           </a:p>
@@ -9061,7 +9061,7 @@
                 <a:ea typeface="Calibri" pitchFamily="34" charset="-122"/>
                 <a:cs typeface="Calibri" pitchFamily="34" charset="-120"/>
               </a:rPr>
-              <a:t>Seniors repel strangers; a marketplace wants rotation. The tension is real.</a:t>
+              <a:t>Planned respite (weeks of lead time, price-sensitive) and urgent respite (hours, price-tolerant) may want different UX, SLAs and prices — and planned is the incumbents' strongest ground.</a:t>
             </a:r>
             <a:endParaRPr lang="en-US" sz="1050" dirty="0"/>
           </a:p>
@@ -9103,7 +9103,7 @@
                 <a:ea typeface="Calibri" pitchFamily="34" charset="-122"/>
                 <a:cs typeface="Calibri" pitchFamily="34" charset="-120"/>
               </a:rPr>
-              <a:t>Crisis moments temporarily raise tolerance for new faces; sticky matching takes over from visit two. Vanguard's staff-first pattern bridges the first meeting. Untested at scale — we say so.</a:t>
+              <a:t>One supply layer, one certification base, sticky matching binding both. The pilot tests both vectors; if the UX diverges, v2 splits the front door — not the platform.</a:t>
             </a:r>
             <a:endParaRPr lang="en-US" sz="1050" dirty="0"/>
           </a:p>
@@ -10019,7 +10019,7 @@
                 <a:ea typeface="Cambria" pitchFamily="34" charset="-122"/>
                 <a:cs typeface="Cambria" pitchFamily="34" charset="-120"/>
               </a:rPr>
-              <a:t>The question moved twice. We have the receipts.</a:t>
+              <a:t>The question kept moving. We kept the receipts.</a:t>
             </a:r>
             <a:endParaRPr lang="en-US" sz="3300" dirty="0"/>
           </a:p>
@@ -10748,7 +10748,7 @@
                 <a:ea typeface="Courier New" pitchFamily="34" charset="-122"/>
                 <a:cs typeface="Courier New" pitchFamily="34" charset="-120"/>
               </a:rPr>
-              <a:t>8 Jul</a:t>
+              <a:t>8–11 Jul</a:t>
             </a:r>
             <a:endParaRPr lang="en-US" sz="1050" dirty="0"/>
           </a:p>
@@ -10814,7 +10814,7 @@
                 <a:ea typeface="Cambria" pitchFamily="34" charset="-122"/>
                 <a:cs typeface="Cambria" pitchFamily="34" charset="-120"/>
               </a:rPr>
-              <a:t>Crisis activation</a:t>
+              <a:t>Need-arises activation</a:t>
             </a:r>
             <a:endParaRPr lang="en-US" sz="1550" dirty="0"/>
           </a:p>
@@ -10856,7 +10856,7 @@
                 <a:ea typeface="Calibri" pitchFamily="34" charset="-122"/>
                 <a:cs typeface="Calibri" pitchFamily="34" charset="-120"/>
               </a:rPr>
-              <a:t>“Activate trusted respite when a crisis hits — on Vanguard's Pasir Ris ICCP pilot.”</a:t>
+              <a:t>“Activate trusted respite when a need arises — planned or urgent — on Vanguard's Pasir Ris ICCP pilot.”</a:t>
             </a:r>
             <a:endParaRPr lang="en-US" sz="1100" dirty="0"/>
           </a:p>
@@ -10898,7 +10898,7 @@
                 <a:ea typeface="Calibri" pitchFamily="34" charset="-122"/>
                 <a:cs typeface="Calibri" pitchFamily="34" charset="-120"/>
               </a:rPr>
-              <a:t>Vanguard named the six crisis triggers. The wedge sharpened.</a:t>
+              <a:t>Vanguard named six crisis triggers on the 8th. On the 11th we caught crisis-only as too tight: planned respite is the same product, longer lead time.</a:t>
             </a:r>
             <a:endParaRPr lang="en-US" sz="1000" dirty="0"/>
           </a:p>
@@ -11315,7 +11315,7 @@
                 <a:ea typeface="Calibri" pitchFamily="34" charset="-122"/>
                 <a:cs typeface="Calibri" pitchFamily="34" charset="-120"/>
               </a:rPr>
-              <a:t>The six crisis triggers — named by Vanguard, in the room:</a:t>
+              <a:t>The urgent six — named by Vanguard, in the room:</a:t>
             </a:r>
             <a:endParaRPr lang="en-US" sz="1250" dirty="0"/>
           </a:p>
@@ -12134,7 +12134,7 @@
                 <a:ea typeface="Calibri" pitchFamily="34" charset="-122"/>
                 <a:cs typeface="Calibri" pitchFamily="34" charset="-120"/>
               </a:rPr>
-              <a:t>Vanguard, 8 Jul 2026: “caregivers don't think about elder-care planning when nothing happened. When something happens... they don't know what to do.”</a:t>
+              <a:t>And the quieter, higher-volume half is planned: appointment overlaps, vacations, weekly gap-fill — same product, longer lead time (HMW, 11 Jul). Urgent is where pain peaks; planned is where volume lives.</a:t>
             </a:r>
             <a:endParaRPr lang="en-US" sz="1000" dirty="0"/>
           </a:p>
@@ -14909,7 +14909,7 @@
                 <a:ea typeface="Calibri" pitchFamily="34" charset="-122"/>
                 <a:cs typeface="Calibri" pitchFamily="34" charset="-120"/>
               </a:rPr>
-              <a:t>Six crisis triggers jump the queue. Matched in hours, not 2–3 weeks. Closer to insurance than to Uber: trusted before it's ever used.</a:t>
+              <a:t>Planned or urgent, one front door. Six urgent triggers jump the queue — matched in hours, not 2–3 weeks. Planned bookings keep trusted supply busy between crises.</a:t>
             </a:r>
             <a:endParaRPr lang="en-US" sz="1150" dirty="0"/>
           </a:p>
@@ -17997,7 +17997,7 @@
                 <a:ea typeface="Calibri" pitchFamily="34" charset="-122"/>
                 <a:cs typeface="Calibri" pitchFamily="34" charset="-120"/>
               </a:rPr>
-              <a:t>Six triggers, one tap. The crisis jumps the queue.</a:t>
+              <a:t>Urgent or planned: crisis jumps the queue, Book-ahead takes the everyday.</a:t>
             </a:r>
             <a:endParaRPr lang="en-US" sz="1050" dirty="0"/>
           </a:p>
